--- a/Rust智能解析底座_汇报.pptx
+++ b/Rust智能解析底座_汇报.pptx
@@ -18,11 +18,10 @@
     <p:sldId id="262" r:id="rId11"/>
     <p:sldId id="276" r:id="rId12"/>
     <p:sldId id="278" r:id="rId13"/>
-    <p:sldId id="279" r:id="rId14"/>
-    <p:sldId id="264" r:id="rId15"/>
-    <p:sldId id="277" r:id="rId16"/>
-    <p:sldId id="265" r:id="rId17"/>
-    <p:sldId id="272" r:id="rId18"/>
+    <p:sldId id="264" r:id="rId14"/>
+    <p:sldId id="277" r:id="rId15"/>
+    <p:sldId id="265" r:id="rId16"/>
+    <p:sldId id="272" r:id="rId17"/>
   </p:sldIdLst>
   <p:sldSz cx="12192000" cy="6858000" type="screen16x9"/>
   <p:notesSz cx="6858000" cy="9144000"/>
@@ -495,7 +494,7 @@
           <a:p>
             <a:r>
               <a:rPr lang="zh-CN" dirty="0"/>
-              <a:t>这页先说明 Graphify 类工具的增量更新边界：通常利用文件 hash 或 manifest 判断变化，对变更文件重新做 AST 提取，再替换或合并节点和边，主要覆盖文件、符号和普通调用关系。统一 Rust 图谱的增量更新范围更大：变更检测要考虑源码、Cargo、feature、生成文件和工具链；RA 分支刷新源码语义，rustc 分支核验缓存并重提取受影响 MIR；统一更新器处理节点、关系和属性的增删改，并沿依赖索引使查询缓存、Unsafe 结论和 Fuzz 目标失效或重算。修改案例中的类型或指针转换时，不能只更新一个函数节点，相关 Call、Value、MIR 记录和专项结果都需要保持同一快照的一致性。</a:t>
+              <a:t>Schema 建议按四层组织。工程层放 workspace、crate、模块和文件，表达包含与依赖。定义层放函数、结构体、枚举、trait 和 impl，表达实现关系与类型使用。使用层保留调用点，引用也可以先作为带位置的关系记录，避免只存一条函数到函数的调用边而丢掉调用现场。分析层按需加入基本块、操作和诊断，以及控制流和数据流关系。前三层构成第一版的源码语义基础，第四层逐步扩展。这里的层级是本方案的数据组织，并不是 RA 的内部结构。跨层连线也不全是包含：调用点会引用定义，分析操作会映射源码，诊断会关联实体。所有层共享源码位置、构建配置、分析来源、快照和解析状态，方便解释结论及后续更新。</a:t>
             </a:r>
             <a:endParaRPr lang="zh-CN" dirty="0"/>
           </a:p>
@@ -555,7 +554,7 @@
           <a:p>
             <a:r>
               <a:rPr lang="zh-CN" dirty="0"/>
-              <a:t>Schema 建议按四层组织。工程层放 workspace、crate、模块和文件，表达包含与依赖。定义层放函数、结构体、枚举、trait 和 impl，表达实现关系与类型使用。使用层保留调用点，引用也可以先作为带位置的关系记录，避免只存一条函数到函数的调用边而丢掉调用现场。分析层按需加入基本块、操作和诊断，以及控制流和数据流关系。前三层构成第一版的源码语义基础，第四层逐步扩展。这里的层级是本方案的数据组织，并不是 RA 的内部结构。跨层连线也不全是包含：调用点会引用定义，分析操作会映射源码，诊断会关联实体。所有层共享源码位置、构建配置、分析来源、快照和解析状态，方便解释结论及后续更新。</a:t>
+              <a:t>左侧沿用 xor_si512_inplace，右侧是简化的预期记录，不是实际工具输出。X 是指针转换表达式，Uses 表示其中对参数 a 的源码引用，ArgumentAt 表示它处于第零个实参位置。C 与 T 区分调用点和目标定义，O 是拟关联的 MIR 操作，B 和 L 只是体记录及位置的示意别名。源码与 MIR 无法确认唯一对应时保留歧义，不强行一一映射。这里只展示局部映射，跨函数路径和运行时来源留待 PoC 验证。</a:t>
             </a:r>
             <a:endParaRPr lang="zh-CN" dirty="0"/>
           </a:p>
@@ -615,7 +614,7 @@
           <a:p>
             <a:r>
               <a:rPr lang="zh-CN" dirty="0"/>
-              <a:t>左侧沿用 xor_si512_inplace，右侧是简化的预期记录，不是实际工具输出。X 是指针转换表达式，Uses 表示其中对参数 a 的源码引用，ArgumentAt 表示它处于第零个实参位置。C 与 T 区分调用点和目标定义，O 是拟关联的 MIR 操作，B 和 L 只是体记录及位置的示意别名。源码与 MIR 无法确认唯一对应时保留歧义，不强行一一映射。这里只展示局部映射，跨函数路径和运行时来源留待 PoC 验证。</a:t>
+              <a:t>MCP 的职责是把底座能力封装成 Agent 可以调用的工具，不在协议层完成语义分析。基础查询先提供实体详情、类型和调用关系。unsafe 方向计划提供危险操作定位和数据流追踪，帮助组织路径及证据；fuzzing 方向计划提供候选入口和输入构造信息，帮助生成有效测试。这些专项名称是拟议接口，不代表我们已经实现了完整算法。每次返回结果，都应包含事实、源码位置和解析状态。覆盖率、崩溃和人工复核结果再关联回原始分析快照，避免混用版本。静态图上的路径不证明真实可执行，得到安全证据也不等于完成安全证明，Agent 需要结合后续验证作判断。</a:t>
             </a:r>
             <a:endParaRPr lang="zh-CN" dirty="0"/>
           </a:p>
@@ -630,66 +629,6 @@
 </file>
 
 <file path=ppt/notesSlides/notesSlide14.xml><?xml version="1.0" encoding="utf-8"?>
-<p:notes xmlns:a="http://schemas.openxmlformats.org/drawingml/2006/main" xmlns:r="http://schemas.openxmlformats.org/officeDocument/2006/relationships" xmlns:p="http://schemas.openxmlformats.org/presentationml/2006/main">
-  <p:cSld>
-    <p:spTree>
-      <p:nvGrpSpPr>
-        <p:cNvPr id="1" name=""/>
-        <p:cNvGrpSpPr/>
-        <p:nvPr/>
-      </p:nvGrpSpPr>
-      <p:grpSpPr>
-        <a:xfrm>
-          <a:off x="0" y="0"/>
-          <a:ext cx="0" cy="0"/>
-          <a:chOff x="0" y="0"/>
-          <a:chExt cx="0" cy="0"/>
-        </a:xfrm>
-      </p:grpSpPr>
-      <p:sp>
-        <p:nvSpPr>
-          <p:cNvPr id="2" name="Slide Image Placeholder 1"/>
-          <p:cNvSpPr>
-            <a:spLocks noGrp="1" noRot="1" noChangeAspect="1"/>
-          </p:cNvSpPr>
-          <p:nvPr>
-            <p:ph type="sldImg" idx="2"/>
-          </p:nvPr>
-        </p:nvSpPr>
-        <p:spPr/>
-      </p:sp>
-      <p:sp>
-        <p:nvSpPr>
-          <p:cNvPr id="3" name="Notes Placeholder 2"/>
-          <p:cNvSpPr>
-            <a:spLocks noGrp="1"/>
-          </p:cNvSpPr>
-          <p:nvPr>
-            <p:ph type="body" sz="quarter" idx="3"/>
-          </p:nvPr>
-        </p:nvSpPr>
-        <p:spPr/>
-        <p:txBody>
-          <a:bodyPr/>
-          <a:lstStyle/>
-          <a:p>
-            <a:r>
-              <a:rPr lang="zh-CN" dirty="0"/>
-              <a:t>MCP 的职责是把底座能力封装成 Agent 可以调用的工具，不在协议层完成语义分析。基础查询先提供实体详情、类型和调用关系。unsafe 方向计划提供危险操作定位和数据流追踪，帮助组织路径及证据；fuzzing 方向计划提供候选入口和输入构造信息，帮助生成有效测试。这些专项名称是拟议接口，不代表我们已经实现了完整算法。每次返回结果，都应包含事实、源码位置和解析状态。覆盖率、崩溃和人工复核结果再关联回原始分析快照，避免混用版本。静态图上的路径不证明真实可执行，得到安全证据也不等于完成安全证明，Agent 需要结合后续验证作判断。</a:t>
-            </a:r>
-            <a:endParaRPr lang="zh-CN" dirty="0"/>
-          </a:p>
-        </p:txBody>
-      </p:sp>
-    </p:spTree>
-  </p:cSld>
-  <p:clrMapOvr>
-    <a:masterClrMapping/>
-  </p:clrMapOvr>
-</p:notes>
-</file>
-
-<file path=ppt/notesSlides/notesSlide15.xml><?xml version="1.0" encoding="utf-8"?>
 <p:notes xmlns:a="http://schemas.openxmlformats.org/drawingml/2006/main" xmlns:r="http://schemas.openxmlformats.org/officeDocument/2006/relationships" xmlns:p="http://schemas.openxmlformats.org/presentationml/2006/main">
   <p:cSld>
     <p:spTree>
@@ -4096,69 +4035,6 @@
           </p:txBody>
         </p:sp>
       </p:grpSp>
-      <p:grpSp>
-        <p:nvGrpSpPr>
-          <p:cNvPr id="45" name="mir-caption"/>
-          <p:cNvGrpSpPr/>
-          <p:nvPr/>
-        </p:nvGrpSpPr>
-        <p:grpSpPr>
-          <a:xfrm>
-            <a:off x="566166" y="6211252"/>
-            <a:ext cx="6537239" cy="205359"/>
-            <a:chOff x="566166" y="6211252"/>
-            <a:chExt cx="6537239" cy="205359"/>
-          </a:xfrm>
-        </p:grpSpPr>
-        <p:sp>
-          <p:nvSpPr>
-            <p:cNvPr id="44" name="TextBox 44"/>
-            <p:cNvSpPr txBox="1"/>
-            <p:nvPr/>
-          </p:nvSpPr>
-          <p:spPr>
-            <a:xfrm>
-              <a:off x="566166" y="6211252"/>
-              <a:ext cx="6537239" cy="205359"/>
-            </a:xfrm>
-            <a:prstGeom prst="rect">
-              <a:avLst/>
-            </a:prstGeom>
-            <a:noFill/>
-            <a:ln>
-              <a:noFill/>
-            </a:ln>
-          </p:spPr>
-          <p:txBody>
-            <a:bodyPr wrap="none" lIns="0" tIns="0" rIns="0" bIns="0" anchor="t" anchorCtr="0">
-              <a:spAutoFit/>
-            </a:bodyPr>
-            <a:lstStyle/>
-            <a:p>
-              <a:pPr algn="l"/>
-              <a:r>
-                <a:rPr lang="zh-CN" sz="1050" dirty="0">
-                  <a:solidFill>
-                    <a:srgbClr val="60758A"/>
-                  </a:solidFill>
-                  <a:latin typeface="Arial" panose="020B0604020202020204"/>
-                  <a:ea typeface="微软雅黑" panose="020B0503020204020204" charset="-122"/>
-                  <a:cs typeface="Arial" panose="020B0604020202020204"/>
-                </a:rPr>
-                <a:t>RA 回答“代码是什么”；MIR 补充“程序如何执行、值如何传播”。Unsafe / Fuzzing 共享同一份过程证据。</a:t>
-              </a:r>
-              <a:endParaRPr lang="zh-CN" sz="1050" dirty="0">
-                <a:solidFill>
-                  <a:srgbClr val="60758A"/>
-                </a:solidFill>
-                <a:latin typeface="Arial" panose="020B0604020202020204"/>
-                <a:ea typeface="微软雅黑" panose="020B0503020204020204" charset="-122"/>
-                <a:cs typeface="Arial" panose="020B0604020202020204"/>
-              </a:endParaRPr>
-            </a:p>
-          </p:txBody>
-        </p:sp>
-      </p:grpSp>
     </p:spTree>
   </p:cSld>
   <p:clrMapOvr>
@@ -4168,1121 +4044,6 @@
 </file>
 
 <file path=ppt/slides/slide11.xml><?xml version="1.0" encoding="utf-8"?>
-<p:sld xmlns:a="http://schemas.openxmlformats.org/drawingml/2006/main" xmlns:r="http://schemas.openxmlformats.org/officeDocument/2006/relationships" xmlns:p="http://schemas.openxmlformats.org/presentationml/2006/main">
-  <p:cSld>
-    <p:spTree>
-      <p:nvGrpSpPr>
-        <p:cNvPr id="1" name=""/>
-        <p:cNvGrpSpPr/>
-        <p:nvPr/>
-      </p:nvGrpSpPr>
-      <p:grpSpPr>
-        <a:xfrm>
-          <a:off x="0" y="0"/>
-          <a:ext cx="0" cy="0"/>
-          <a:chOff x="0" y="0"/>
-          <a:chExt cx="0" cy="0"/>
-        </a:xfrm>
-      </p:grpSpPr>
-      <p:grpSp>
-        <p:nvGrpSpPr>
-          <p:cNvPr id="4" name="header"/>
-          <p:cNvGrpSpPr/>
-          <p:nvPr/>
-        </p:nvGrpSpPr>
-        <p:grpSpPr>
-          <a:xfrm>
-            <a:off x="499110" y="428625"/>
-            <a:ext cx="10273024" cy="849440"/>
-            <a:chOff x="499110" y="428625"/>
-            <a:chExt cx="10273024" cy="849440"/>
-          </a:xfrm>
-        </p:grpSpPr>
-        <p:sp>
-          <p:nvSpPr>
-            <p:cNvPr id="2" name="TextBox 2"/>
-            <p:cNvSpPr txBox="1"/>
-            <p:nvPr/>
-          </p:nvSpPr>
-          <p:spPr>
-            <a:xfrm>
-              <a:off x="499110" y="428625"/>
-              <a:ext cx="9319260" cy="586740"/>
-            </a:xfrm>
-            <a:prstGeom prst="rect">
-              <a:avLst/>
-            </a:prstGeom>
-            <a:noFill/>
-            <a:ln>
-              <a:noFill/>
-            </a:ln>
-          </p:spPr>
-          <p:txBody>
-            <a:bodyPr wrap="none" lIns="0" tIns="0" rIns="0" bIns="0" anchor="t" anchorCtr="0">
-              <a:spAutoFit/>
-            </a:bodyPr>
-            <a:lstStyle/>
-            <a:p>
-              <a:pPr algn="l"/>
-              <a:r>
-                <a:rPr lang="zh-CN" sz="3000" b="1" dirty="0">
-                  <a:solidFill>
-                    <a:srgbClr val="17324D"/>
-                  </a:solidFill>
-                  <a:latin typeface="Arial" panose="020B0604020202020204"/>
-                  <a:ea typeface="微软雅黑" panose="020B0503020204020204" charset="-122"/>
-                  <a:cs typeface="Arial" panose="020B0604020202020204"/>
-                </a:rPr>
-                <a:t>统一图谱增量更新：从工具级扫描到跨来源一致快照</a:t>
-              </a:r>
-              <a:endParaRPr lang="zh-CN" sz="3000" b="1" dirty="0">
-                <a:solidFill>
-                  <a:srgbClr val="17324D"/>
-                </a:solidFill>
-                <a:latin typeface="Arial" panose="020B0604020202020204"/>
-                <a:ea typeface="微软雅黑" panose="020B0503020204020204" charset="-122"/>
-                <a:cs typeface="Arial" panose="020B0604020202020204"/>
-              </a:endParaRPr>
-            </a:p>
-          </p:txBody>
-        </p:sp>
-        <p:sp>
-          <p:nvSpPr>
-            <p:cNvPr id="3" name="TextBox 3"/>
-            <p:cNvSpPr txBox="1"/>
-            <p:nvPr/>
-          </p:nvSpPr>
-          <p:spPr>
-            <a:xfrm>
-              <a:off x="534543" y="955358"/>
-              <a:ext cx="10237591" cy="322707"/>
-            </a:xfrm>
-            <a:prstGeom prst="rect">
-              <a:avLst/>
-            </a:prstGeom>
-            <a:noFill/>
-            <a:ln>
-              <a:noFill/>
-            </a:ln>
-          </p:spPr>
-          <p:txBody>
-            <a:bodyPr wrap="none" lIns="0" tIns="0" rIns="0" bIns="0" anchor="t" anchorCtr="0">
-              <a:spAutoFit/>
-            </a:bodyPr>
-            <a:lstStyle/>
-            <a:p>
-              <a:pPr algn="l"/>
-              <a:r>
-                <a:rPr lang="zh-CN" sz="1650" dirty="0">
-                  <a:solidFill>
-                    <a:srgbClr val="60758A"/>
-                  </a:solidFill>
-                  <a:latin typeface="Arial" panose="020B0604020202020204"/>
-                  <a:ea typeface="微软雅黑" panose="020B0503020204020204" charset="-122"/>
-                  <a:cs typeface="Arial" panose="020B0604020202020204"/>
-                </a:rPr>
-                <a:t>Graphify 类工具通常按文件变更重新提取；本项目要进一步统一更新 RA、rustc、关系和派生分析结果。</a:t>
-              </a:r>
-              <a:endParaRPr lang="zh-CN" sz="1650" dirty="0">
-                <a:solidFill>
-                  <a:srgbClr val="60758A"/>
-                </a:solidFill>
-                <a:latin typeface="Arial" panose="020B0604020202020204"/>
-                <a:ea typeface="微软雅黑" panose="020B0503020204020204" charset="-122"/>
-                <a:cs typeface="Arial" panose="020B0604020202020204"/>
-              </a:endParaRPr>
-            </a:p>
-          </p:txBody>
-        </p:sp>
-      </p:grpSp>
-      <p:sp>
-        <p:nvSpPr>
-          <p:cNvPr id="5" name="TextBox 5"/>
-          <p:cNvSpPr txBox="1"/>
-          <p:nvPr/>
-        </p:nvSpPr>
-        <p:spPr>
-          <a:xfrm>
-            <a:off x="11614404" y="6328410"/>
-            <a:ext cx="506226" cy="234696"/>
-          </a:xfrm>
-          <a:prstGeom prst="rect">
-            <a:avLst/>
-          </a:prstGeom>
-          <a:noFill/>
-          <a:ln>
-            <a:noFill/>
-          </a:ln>
-        </p:spPr>
-        <p:txBody>
-          <a:bodyPr wrap="none" lIns="0" tIns="0" rIns="0" bIns="0" anchor="t" anchorCtr="0">
-            <a:spAutoFit/>
-          </a:bodyPr>
-          <a:lstStyle/>
-          <a:p>
-            <a:pPr algn="l"/>
-            <a:r>
-              <a:rPr lang="zh-CN" sz="1200" dirty="0">
-                <a:solidFill>
-                  <a:srgbClr val="60758A"/>
-                </a:solidFill>
-                <a:latin typeface="Arial" panose="020B0604020202020204"/>
-                <a:ea typeface="Arial" panose="020B0604020202020204"/>
-                <a:cs typeface="Arial" panose="020B0604020202020204"/>
-              </a:rPr>
-              <a:t>11 / 17</a:t>
-            </a:r>
-            <a:endParaRPr lang="zh-CN" sz="1200" dirty="0">
-              <a:solidFill>
-                <a:srgbClr val="60758A"/>
-              </a:solidFill>
-              <a:latin typeface="Arial" panose="020B0604020202020204"/>
-              <a:ea typeface="Arial" panose="020B0604020202020204"/>
-              <a:cs typeface="Arial" panose="020B0604020202020204"/>
-            </a:endParaRPr>
-          </a:p>
-        </p:txBody>
-      </p:sp>
-      <p:grpSp>
-        <p:nvGrpSpPr>
-          <p:cNvPr id="9" name="baseline"/>
-          <p:cNvGrpSpPr/>
-          <p:nvPr/>
-        </p:nvGrpSpPr>
-        <p:grpSpPr>
-          <a:xfrm>
-            <a:off x="571500" y="1485900"/>
-            <a:ext cx="11010900" cy="1381125"/>
-            <a:chOff x="571500" y="1485900"/>
-            <a:chExt cx="11010900" cy="1381125"/>
-          </a:xfrm>
-        </p:grpSpPr>
-        <p:sp>
-          <p:nvSpPr>
-            <p:cNvPr id="6" name="Rectangle 6"/>
-            <p:cNvSpPr/>
-            <p:nvPr/>
-          </p:nvSpPr>
-          <p:spPr>
-            <a:xfrm>
-              <a:off x="571500" y="1485900"/>
-              <a:ext cx="11010900" cy="1381125"/>
-            </a:xfrm>
-            <a:prstGeom prst="roundRect">
-              <a:avLst>
-                <a:gd name="adj" fmla="val 5517"/>
-              </a:avLst>
-            </a:prstGeom>
-            <a:solidFill>
-              <a:srgbClr val="F2F6FA"/>
-            </a:solidFill>
-            <a:ln>
-              <a:noFill/>
-            </a:ln>
-          </p:spPr>
-        </p:sp>
-        <p:sp>
-          <p:nvSpPr>
-            <p:cNvPr id="7" name="TextBox 7"/>
-            <p:cNvSpPr txBox="1"/>
-            <p:nvPr/>
-          </p:nvSpPr>
-          <p:spPr>
-            <a:xfrm>
-              <a:off x="790956" y="1634490"/>
-              <a:ext cx="3270328" cy="352044"/>
-            </a:xfrm>
-            <a:prstGeom prst="rect">
-              <a:avLst/>
-            </a:prstGeom>
-            <a:noFill/>
-            <a:ln>
-              <a:noFill/>
-            </a:ln>
-          </p:spPr>
-          <p:txBody>
-            <a:bodyPr wrap="none" lIns="0" tIns="0" rIns="0" bIns="0" anchor="t" anchorCtr="0">
-              <a:spAutoFit/>
-            </a:bodyPr>
-            <a:lstStyle/>
-            <a:p>
-              <a:pPr algn="l"/>
-              <a:r>
-                <a:rPr lang="zh-CN" sz="1800" b="1" dirty="0">
-                  <a:solidFill>
-                    <a:srgbClr val="17324D"/>
-                  </a:solidFill>
-                  <a:latin typeface="Arial" panose="020B0604020202020204"/>
-                  <a:ea typeface="微软雅黑" panose="020B0503020204020204" charset="-122"/>
-                  <a:cs typeface="Arial" panose="020B0604020202020204"/>
-                </a:rPr>
-                <a:t>Graphify 类结构图的常见做法</a:t>
-              </a:r>
-              <a:endParaRPr lang="zh-CN" sz="1800" b="1" dirty="0">
-                <a:solidFill>
-                  <a:srgbClr val="17324D"/>
-                </a:solidFill>
-                <a:latin typeface="Arial" panose="020B0604020202020204"/>
-                <a:ea typeface="微软雅黑" panose="020B0503020204020204" charset="-122"/>
-                <a:cs typeface="Arial" panose="020B0604020202020204"/>
-              </a:endParaRPr>
-            </a:p>
-          </p:txBody>
-        </p:sp>
-        <p:sp>
-          <p:nvSpPr>
-            <p:cNvPr id="8" name="TextBox 8"/>
-            <p:cNvSpPr txBox="1"/>
-            <p:nvPr/>
-          </p:nvSpPr>
-          <p:spPr>
-            <a:xfrm>
-              <a:off x="792861" y="2017871"/>
-              <a:ext cx="5525596" cy="831152"/>
-            </a:xfrm>
-            <a:prstGeom prst="rect">
-              <a:avLst/>
-            </a:prstGeom>
-            <a:noFill/>
-            <a:ln>
-              <a:noFill/>
-            </a:ln>
-          </p:spPr>
-          <p:txBody>
-            <a:bodyPr wrap="none" lIns="0" tIns="0" rIns="0" bIns="0" anchor="t" anchorCtr="0">
-              <a:spAutoFit/>
-            </a:bodyPr>
-            <a:lstStyle/>
-            <a:p>
-              <a:pPr algn="l">
-                <a:lnSpc>
-                  <a:spcPts val="2175"/>
-                </a:lnSpc>
-              </a:pPr>
-              <a:r>
-                <a:rPr lang="zh-CN" sz="1420" dirty="0">
-                  <a:solidFill>
-                    <a:srgbClr val="243B53"/>
-                  </a:solidFill>
-                  <a:latin typeface="Arial" panose="020B0604020202020204"/>
-                  <a:ea typeface="微软雅黑" panose="020B0503020204020204" charset="-122"/>
-                  <a:cs typeface="Arial" panose="020B0604020202020204"/>
-                </a:rPr>
-                <a:t>文件 hash / manifest 判断变化</a:t>
-              </a:r>
-              <a:br>
-                <a:rPr lang="zh-CN" sz="1420" dirty="0">
-                  <a:solidFill>
-                    <a:srgbClr val="243B53"/>
-                  </a:solidFill>
-                  <a:latin typeface="Arial" panose="020B0604020202020204"/>
-                  <a:ea typeface="微软雅黑" panose="020B0503020204020204" charset="-122"/>
-                  <a:cs typeface="Arial" panose="020B0604020202020204"/>
-                </a:rPr>
-              </a:br>
-              <a:r>
-                <a:rPr lang="zh-CN" sz="1420" dirty="0">
-                  <a:solidFill>
-                    <a:srgbClr val="243B53"/>
-                  </a:solidFill>
-                  <a:latin typeface="Arial" panose="020B0604020202020204"/>
-                  <a:ea typeface="微软雅黑" panose="020B0503020204020204" charset="-122"/>
-                  <a:cs typeface="Arial" panose="020B0604020202020204"/>
-                </a:rPr>
-                <a:t>变更文件重新做 AST 提取 → 替换或合并节点、边 → 写回 graph.json</a:t>
-              </a:r>
-              <a:br>
-                <a:rPr lang="zh-CN" sz="1420" dirty="0">
-                  <a:solidFill>
-                    <a:srgbClr val="243B53"/>
-                  </a:solidFill>
-                  <a:latin typeface="Arial" panose="020B0604020202020204"/>
-                  <a:ea typeface="微软雅黑" panose="020B0503020204020204" charset="-122"/>
-                  <a:cs typeface="Arial" panose="020B0604020202020204"/>
-                </a:rPr>
-              </a:br>
-              <a:r>
-                <a:rPr lang="zh-CN" sz="1420" dirty="0">
-                  <a:solidFill>
-                    <a:srgbClr val="243B53"/>
-                  </a:solidFill>
-                  <a:latin typeface="Arial" panose="020B0604020202020204"/>
-                  <a:ea typeface="微软雅黑" panose="020B0503020204020204" charset="-122"/>
-                  <a:cs typeface="Arial" panose="020B0604020202020204"/>
-                </a:rPr>
-                <a:t>优点：实现简单；边界：主要更新文件、符号和普通调用关系</a:t>
-              </a:r>
-              <a:endParaRPr lang="zh-CN" sz="1420" dirty="0">
-                <a:solidFill>
-                  <a:srgbClr val="243B53"/>
-                </a:solidFill>
-                <a:latin typeface="Arial" panose="020B0604020202020204"/>
-                <a:ea typeface="微软雅黑" panose="020B0503020204020204" charset="-122"/>
-                <a:cs typeface="Arial" panose="020B0604020202020204"/>
-              </a:endParaRPr>
-            </a:p>
-          </p:txBody>
-        </p:sp>
-      </p:grpSp>
-      <p:grpSp>
-        <p:nvGrpSpPr>
-          <p:cNvPr id="24" name="our-flow"/>
-          <p:cNvGrpSpPr/>
-          <p:nvPr/>
-        </p:nvGrpSpPr>
-        <p:grpSpPr>
-          <a:xfrm>
-            <a:off x="571500" y="3143250"/>
-            <a:ext cx="11010900" cy="2333625"/>
-            <a:chOff x="571500" y="3143250"/>
-            <a:chExt cx="11010900" cy="2333625"/>
-          </a:xfrm>
-        </p:grpSpPr>
-        <p:sp>
-          <p:nvSpPr>
-            <p:cNvPr id="10" name="Rectangle 10"/>
-            <p:cNvSpPr/>
-            <p:nvPr/>
-          </p:nvSpPr>
-          <p:spPr>
-            <a:xfrm>
-              <a:off x="571500" y="3143250"/>
-              <a:ext cx="11010900" cy="2333625"/>
-            </a:xfrm>
-            <a:prstGeom prst="roundRect">
-              <a:avLst>
-                <a:gd name="adj" fmla="val 3265"/>
-              </a:avLst>
-            </a:prstGeom>
-            <a:solidFill>
-              <a:srgbClr val="17324D"/>
-            </a:solidFill>
-            <a:ln>
-              <a:noFill/>
-            </a:ln>
-          </p:spPr>
-        </p:sp>
-        <p:sp>
-          <p:nvSpPr>
-            <p:cNvPr id="11" name="TextBox 11"/>
-            <p:cNvSpPr txBox="1"/>
-            <p:nvPr/>
-          </p:nvSpPr>
-          <p:spPr>
-            <a:xfrm>
-              <a:off x="790575" y="3302794"/>
-              <a:ext cx="2296820" cy="366712"/>
-            </a:xfrm>
-            <a:prstGeom prst="rect">
-              <a:avLst/>
-            </a:prstGeom>
-            <a:noFill/>
-            <a:ln>
-              <a:noFill/>
-            </a:ln>
-          </p:spPr>
-          <p:txBody>
-            <a:bodyPr wrap="none" lIns="0" tIns="0" rIns="0" bIns="0" anchor="t" anchorCtr="0">
-              <a:spAutoFit/>
-            </a:bodyPr>
-            <a:lstStyle/>
-            <a:p>
-              <a:pPr algn="l"/>
-              <a:r>
-                <a:rPr lang="zh-CN" sz="1880" b="1" dirty="0">
-                  <a:solidFill>
-                    <a:srgbClr val="FFFFFF"/>
-                  </a:solidFill>
-                  <a:latin typeface="Arial" panose="020B0604020202020204"/>
-                  <a:ea typeface="微软雅黑" panose="020B0503020204020204" charset="-122"/>
-                  <a:cs typeface="Arial" panose="020B0604020202020204"/>
-                </a:rPr>
-                <a:t>统一图谱的增量更新</a:t>
-              </a:r>
-              <a:endParaRPr lang="zh-CN" sz="1880" b="1" dirty="0">
-                <a:solidFill>
-                  <a:srgbClr val="FFFFFF"/>
-                </a:solidFill>
-                <a:latin typeface="Arial" panose="020B0604020202020204"/>
-                <a:ea typeface="微软雅黑" panose="020B0503020204020204" charset="-122"/>
-                <a:cs typeface="Arial" panose="020B0604020202020204"/>
-              </a:endParaRPr>
-            </a:p>
-          </p:txBody>
-        </p:sp>
-        <p:sp>
-          <p:nvSpPr>
-            <p:cNvPr id="12" name="TextBox 12"/>
-            <p:cNvSpPr txBox="1"/>
-            <p:nvPr/>
-          </p:nvSpPr>
-          <p:spPr>
-            <a:xfrm>
-              <a:off x="811911" y="3732371"/>
-              <a:ext cx="120801" cy="278702"/>
-            </a:xfrm>
-            <a:prstGeom prst="rect">
-              <a:avLst/>
-            </a:prstGeom>
-            <a:noFill/>
-            <a:ln>
-              <a:noFill/>
-            </a:ln>
-          </p:spPr>
-          <p:txBody>
-            <a:bodyPr wrap="none" lIns="0" tIns="0" rIns="0" bIns="0" anchor="t" anchorCtr="0">
-              <a:spAutoFit/>
-            </a:bodyPr>
-            <a:lstStyle/>
-            <a:p>
-              <a:pPr algn="l"/>
-              <a:r>
-                <a:rPr lang="zh-CN" sz="1420" b="1" dirty="0">
-                  <a:solidFill>
-                    <a:srgbClr val="008C95"/>
-                  </a:solidFill>
-                  <a:latin typeface="Arial" panose="020B0604020202020204"/>
-                  <a:ea typeface="Arial" panose="020B0604020202020204"/>
-                  <a:cs typeface="Arial" panose="020B0604020202020204"/>
-                </a:rPr>
-                <a:t>1</a:t>
-              </a:r>
-              <a:endParaRPr lang="zh-CN" sz="1420" b="1" dirty="0">
-                <a:solidFill>
-                  <a:srgbClr val="008C95"/>
-                </a:solidFill>
-                <a:latin typeface="Arial" panose="020B0604020202020204"/>
-                <a:ea typeface="Arial" panose="020B0604020202020204"/>
-                <a:cs typeface="Arial" panose="020B0604020202020204"/>
-              </a:endParaRPr>
-            </a:p>
-          </p:txBody>
-        </p:sp>
-        <p:sp>
-          <p:nvSpPr>
-            <p:cNvPr id="13" name="TextBox 13"/>
-            <p:cNvSpPr txBox="1"/>
-            <p:nvPr/>
-          </p:nvSpPr>
-          <p:spPr>
-            <a:xfrm>
-              <a:off x="1173480" y="3724275"/>
-              <a:ext cx="822960" cy="293370"/>
-            </a:xfrm>
-            <a:prstGeom prst="rect">
-              <a:avLst/>
-            </a:prstGeom>
-            <a:noFill/>
-            <a:ln>
-              <a:noFill/>
-            </a:ln>
-          </p:spPr>
-          <p:txBody>
-            <a:bodyPr wrap="none" lIns="0" tIns="0" rIns="0" bIns="0" anchor="t" anchorCtr="0">
-              <a:spAutoFit/>
-            </a:bodyPr>
-            <a:lstStyle/>
-            <a:p>
-              <a:pPr algn="l"/>
-              <a:r>
-                <a:rPr lang="zh-CN" sz="1500" b="1" dirty="0">
-                  <a:solidFill>
-                    <a:srgbClr val="FFFFFF"/>
-                  </a:solidFill>
-                  <a:latin typeface="Arial" panose="020B0604020202020204"/>
-                  <a:ea typeface="微软雅黑" panose="020B0503020204020204" charset="-122"/>
-                  <a:cs typeface="Arial" panose="020B0604020202020204"/>
-                </a:rPr>
-                <a:t>变更检测</a:t>
-              </a:r>
-              <a:endParaRPr lang="zh-CN" sz="1500" b="1" dirty="0">
-                <a:solidFill>
-                  <a:srgbClr val="FFFFFF"/>
-                </a:solidFill>
-                <a:latin typeface="Arial" panose="020B0604020202020204"/>
-                <a:ea typeface="微软雅黑" panose="020B0503020204020204" charset="-122"/>
-                <a:cs typeface="Arial" panose="020B0604020202020204"/>
-              </a:endParaRPr>
-            </a:p>
-          </p:txBody>
-        </p:sp>
-        <p:sp>
-          <p:nvSpPr>
-            <p:cNvPr id="14" name="TextBox 14"/>
-            <p:cNvSpPr txBox="1"/>
-            <p:nvPr/>
-          </p:nvSpPr>
-          <p:spPr>
-            <a:xfrm>
-              <a:off x="2565273" y="3748564"/>
-              <a:ext cx="4566106" cy="249364"/>
-            </a:xfrm>
-            <a:prstGeom prst="rect">
-              <a:avLst/>
-            </a:prstGeom>
-            <a:noFill/>
-            <a:ln>
-              <a:noFill/>
-            </a:ln>
-          </p:spPr>
-          <p:txBody>
-            <a:bodyPr wrap="none" lIns="0" tIns="0" rIns="0" bIns="0" anchor="t" anchorCtr="0">
-              <a:spAutoFit/>
-            </a:bodyPr>
-            <a:lstStyle/>
-            <a:p>
-              <a:pPr algn="l"/>
-              <a:r>
-                <a:rPr lang="zh-CN" sz="1280" dirty="0">
-                  <a:solidFill>
-                    <a:srgbClr val="FFFFFF"/>
-                  </a:solidFill>
-                  <a:latin typeface="Arial" panose="020B0604020202020204"/>
-                  <a:ea typeface="微软雅黑" panose="020B0503020204020204" charset="-122"/>
-                  <a:cs typeface="Arial" panose="020B0604020202020204"/>
-                </a:rPr>
-                <a:t>源码、Cargo、feature、生成文件、工具链 → 计算影响范围</a:t>
-              </a:r>
-              <a:endParaRPr lang="zh-CN" sz="1280" dirty="0">
-                <a:solidFill>
-                  <a:srgbClr val="FFFFFF"/>
-                </a:solidFill>
-                <a:latin typeface="Arial" panose="020B0604020202020204"/>
-                <a:ea typeface="微软雅黑" panose="020B0503020204020204" charset="-122"/>
-                <a:cs typeface="Arial" panose="020B0604020202020204"/>
-              </a:endParaRPr>
-            </a:p>
-          </p:txBody>
-        </p:sp>
-        <p:sp>
-          <p:nvSpPr>
-            <p:cNvPr id="15" name="TextBox 15"/>
-            <p:cNvSpPr txBox="1"/>
-            <p:nvPr/>
-          </p:nvSpPr>
-          <p:spPr>
-            <a:xfrm>
-              <a:off x="811911" y="4103846"/>
-              <a:ext cx="120801" cy="278702"/>
-            </a:xfrm>
-            <a:prstGeom prst="rect">
-              <a:avLst/>
-            </a:prstGeom>
-            <a:noFill/>
-            <a:ln>
-              <a:noFill/>
-            </a:ln>
-          </p:spPr>
-          <p:txBody>
-            <a:bodyPr wrap="none" lIns="0" tIns="0" rIns="0" bIns="0" anchor="t" anchorCtr="0">
-              <a:spAutoFit/>
-            </a:bodyPr>
-            <a:lstStyle/>
-            <a:p>
-              <a:pPr algn="l"/>
-              <a:r>
-                <a:rPr lang="zh-CN" sz="1420" b="1" dirty="0">
-                  <a:solidFill>
-                    <a:srgbClr val="008C95"/>
-                  </a:solidFill>
-                  <a:latin typeface="Arial" panose="020B0604020202020204"/>
-                  <a:ea typeface="Arial" panose="020B0604020202020204"/>
-                  <a:cs typeface="Arial" panose="020B0604020202020204"/>
-                </a:rPr>
-                <a:t>2</a:t>
-              </a:r>
-              <a:endParaRPr lang="zh-CN" sz="1420" b="1" dirty="0">
-                <a:solidFill>
-                  <a:srgbClr val="008C95"/>
-                </a:solidFill>
-                <a:latin typeface="Arial" panose="020B0604020202020204"/>
-                <a:ea typeface="Arial" panose="020B0604020202020204"/>
-                <a:cs typeface="Arial" panose="020B0604020202020204"/>
-              </a:endParaRPr>
-            </a:p>
-          </p:txBody>
-        </p:sp>
-        <p:sp>
-          <p:nvSpPr>
-            <p:cNvPr id="16" name="TextBox 16"/>
-            <p:cNvSpPr txBox="1"/>
-            <p:nvPr/>
-          </p:nvSpPr>
-          <p:spPr>
-            <a:xfrm>
-              <a:off x="1173480" y="4095750"/>
-              <a:ext cx="822960" cy="293370"/>
-            </a:xfrm>
-            <a:prstGeom prst="rect">
-              <a:avLst/>
-            </a:prstGeom>
-            <a:noFill/>
-            <a:ln>
-              <a:noFill/>
-            </a:ln>
-          </p:spPr>
-          <p:txBody>
-            <a:bodyPr wrap="none" lIns="0" tIns="0" rIns="0" bIns="0" anchor="t" anchorCtr="0">
-              <a:spAutoFit/>
-            </a:bodyPr>
-            <a:lstStyle/>
-            <a:p>
-              <a:pPr algn="l"/>
-              <a:r>
-                <a:rPr lang="zh-CN" sz="1500" b="1" dirty="0">
-                  <a:solidFill>
-                    <a:srgbClr val="FFFFFF"/>
-                  </a:solidFill>
-                  <a:latin typeface="Arial" panose="020B0604020202020204"/>
-                  <a:ea typeface="微软雅黑" panose="020B0503020204020204" charset="-122"/>
-                  <a:cs typeface="Arial" panose="020B0604020202020204"/>
-                </a:rPr>
-                <a:t>两路刷新</a:t>
-              </a:r>
-              <a:endParaRPr lang="zh-CN" sz="1500" b="1" dirty="0">
-                <a:solidFill>
-                  <a:srgbClr val="FFFFFF"/>
-                </a:solidFill>
-                <a:latin typeface="Arial" panose="020B0604020202020204"/>
-                <a:ea typeface="微软雅黑" panose="020B0503020204020204" charset="-122"/>
-                <a:cs typeface="Arial" panose="020B0604020202020204"/>
-              </a:endParaRPr>
-            </a:p>
-          </p:txBody>
-        </p:sp>
-        <p:sp>
-          <p:nvSpPr>
-            <p:cNvPr id="17" name="TextBox 17"/>
-            <p:cNvSpPr txBox="1"/>
-            <p:nvPr/>
-          </p:nvSpPr>
-          <p:spPr>
-            <a:xfrm>
-              <a:off x="2565273" y="4120039"/>
-              <a:ext cx="4223685" cy="249364"/>
-            </a:xfrm>
-            <a:prstGeom prst="rect">
-              <a:avLst/>
-            </a:prstGeom>
-            <a:noFill/>
-            <a:ln>
-              <a:noFill/>
-            </a:ln>
-          </p:spPr>
-          <p:txBody>
-            <a:bodyPr wrap="none" lIns="0" tIns="0" rIns="0" bIns="0" anchor="t" anchorCtr="0">
-              <a:spAutoFit/>
-            </a:bodyPr>
-            <a:lstStyle/>
-            <a:p>
-              <a:pPr algn="l"/>
-              <a:r>
-                <a:rPr lang="zh-CN" sz="1280" dirty="0">
-                  <a:solidFill>
-                    <a:srgbClr val="FFFFFF"/>
-                  </a:solidFill>
-                  <a:latin typeface="Arial" panose="020B0604020202020204"/>
-                  <a:ea typeface="微软雅黑" panose="020B0503020204020204" charset="-122"/>
-                  <a:cs typeface="Arial" panose="020B0604020202020204"/>
-                </a:rPr>
-                <a:t>RA 更新源码语义；rustc 核验缓存并重提取受影响 MIR</a:t>
-              </a:r>
-              <a:endParaRPr lang="zh-CN" sz="1280" dirty="0">
-                <a:solidFill>
-                  <a:srgbClr val="FFFFFF"/>
-                </a:solidFill>
-                <a:latin typeface="Arial" panose="020B0604020202020204"/>
-                <a:ea typeface="微软雅黑" panose="020B0503020204020204" charset="-122"/>
-                <a:cs typeface="Arial" panose="020B0604020202020204"/>
-              </a:endParaRPr>
-            </a:p>
-          </p:txBody>
-        </p:sp>
-        <p:sp>
-          <p:nvSpPr>
-            <p:cNvPr id="18" name="TextBox 18"/>
-            <p:cNvSpPr txBox="1"/>
-            <p:nvPr/>
-          </p:nvSpPr>
-          <p:spPr>
-            <a:xfrm>
-              <a:off x="811911" y="4475321"/>
-              <a:ext cx="120801" cy="278702"/>
-            </a:xfrm>
-            <a:prstGeom prst="rect">
-              <a:avLst/>
-            </a:prstGeom>
-            <a:noFill/>
-            <a:ln>
-              <a:noFill/>
-            </a:ln>
-          </p:spPr>
-          <p:txBody>
-            <a:bodyPr wrap="none" lIns="0" tIns="0" rIns="0" bIns="0" anchor="t" anchorCtr="0">
-              <a:spAutoFit/>
-            </a:bodyPr>
-            <a:lstStyle/>
-            <a:p>
-              <a:pPr algn="l"/>
-              <a:r>
-                <a:rPr lang="zh-CN" sz="1420" b="1" dirty="0">
-                  <a:solidFill>
-                    <a:srgbClr val="008C95"/>
-                  </a:solidFill>
-                  <a:latin typeface="Arial" panose="020B0604020202020204"/>
-                  <a:ea typeface="Arial" panose="020B0604020202020204"/>
-                  <a:cs typeface="Arial" panose="020B0604020202020204"/>
-                </a:rPr>
-                <a:t>3</a:t>
-              </a:r>
-              <a:endParaRPr lang="zh-CN" sz="1420" b="1" dirty="0">
-                <a:solidFill>
-                  <a:srgbClr val="008C95"/>
-                </a:solidFill>
-                <a:latin typeface="Arial" panose="020B0604020202020204"/>
-                <a:ea typeface="Arial" panose="020B0604020202020204"/>
-                <a:cs typeface="Arial" panose="020B0604020202020204"/>
-              </a:endParaRPr>
-            </a:p>
-          </p:txBody>
-        </p:sp>
-        <p:sp>
-          <p:nvSpPr>
-            <p:cNvPr id="19" name="TextBox 19"/>
-            <p:cNvSpPr txBox="1"/>
-            <p:nvPr/>
-          </p:nvSpPr>
-          <p:spPr>
-            <a:xfrm>
-              <a:off x="1173480" y="4467225"/>
-              <a:ext cx="822960" cy="293370"/>
-            </a:xfrm>
-            <a:prstGeom prst="rect">
-              <a:avLst/>
-            </a:prstGeom>
-            <a:noFill/>
-            <a:ln>
-              <a:noFill/>
-            </a:ln>
-          </p:spPr>
-          <p:txBody>
-            <a:bodyPr wrap="none" lIns="0" tIns="0" rIns="0" bIns="0" anchor="t" anchorCtr="0">
-              <a:spAutoFit/>
-            </a:bodyPr>
-            <a:lstStyle/>
-            <a:p>
-              <a:pPr algn="l"/>
-              <a:r>
-                <a:rPr lang="zh-CN" sz="1500" b="1" dirty="0">
-                  <a:solidFill>
-                    <a:srgbClr val="FFFFFF"/>
-                  </a:solidFill>
-                  <a:latin typeface="Arial" panose="020B0604020202020204"/>
-                  <a:ea typeface="微软雅黑" panose="020B0503020204020204" charset="-122"/>
-                  <a:cs typeface="Arial" panose="020B0604020202020204"/>
-                </a:rPr>
-                <a:t>差异入库</a:t>
-              </a:r>
-              <a:endParaRPr lang="zh-CN" sz="1500" b="1" dirty="0">
-                <a:solidFill>
-                  <a:srgbClr val="FFFFFF"/>
-                </a:solidFill>
-                <a:latin typeface="Arial" panose="020B0604020202020204"/>
-                <a:ea typeface="微软雅黑" panose="020B0503020204020204" charset="-122"/>
-                <a:cs typeface="Arial" panose="020B0604020202020204"/>
-              </a:endParaRPr>
-            </a:p>
-          </p:txBody>
-        </p:sp>
-        <p:sp>
-          <p:nvSpPr>
-            <p:cNvPr id="20" name="TextBox 20"/>
-            <p:cNvSpPr txBox="1"/>
-            <p:nvPr/>
-          </p:nvSpPr>
-          <p:spPr>
-            <a:xfrm>
-              <a:off x="2565273" y="4491514"/>
-              <a:ext cx="4148480" cy="249364"/>
-            </a:xfrm>
-            <a:prstGeom prst="rect">
-              <a:avLst/>
-            </a:prstGeom>
-            <a:noFill/>
-            <a:ln>
-              <a:noFill/>
-            </a:ln>
-          </p:spPr>
-          <p:txBody>
-            <a:bodyPr wrap="none" lIns="0" tIns="0" rIns="0" bIns="0" anchor="t" anchorCtr="0">
-              <a:spAutoFit/>
-            </a:bodyPr>
-            <a:lstStyle/>
-            <a:p>
-              <a:pPr algn="l"/>
-              <a:r>
-                <a:rPr lang="zh-CN" sz="1280" dirty="0">
-                  <a:solidFill>
-                    <a:srgbClr val="FFFFFF"/>
-                  </a:solidFill>
-                  <a:latin typeface="Arial" panose="020B0604020202020204"/>
-                  <a:ea typeface="微软雅黑" panose="020B0503020204020204" charset="-122"/>
-                  <a:cs typeface="Arial" panose="020B0604020202020204"/>
-                </a:rPr>
-                <a:t>节点、关系、属性新增／修改／删除；保留来源与快照</a:t>
-              </a:r>
-              <a:endParaRPr lang="zh-CN" sz="1280" dirty="0">
-                <a:solidFill>
-                  <a:srgbClr val="FFFFFF"/>
-                </a:solidFill>
-                <a:latin typeface="Arial" panose="020B0604020202020204"/>
-                <a:ea typeface="微软雅黑" panose="020B0503020204020204" charset="-122"/>
-                <a:cs typeface="Arial" panose="020B0604020202020204"/>
-              </a:endParaRPr>
-            </a:p>
-          </p:txBody>
-        </p:sp>
-        <p:sp>
-          <p:nvSpPr>
-            <p:cNvPr id="21" name="TextBox 21"/>
-            <p:cNvSpPr txBox="1"/>
-            <p:nvPr/>
-          </p:nvSpPr>
-          <p:spPr>
-            <a:xfrm>
-              <a:off x="811911" y="4846796"/>
-              <a:ext cx="120801" cy="278702"/>
-            </a:xfrm>
-            <a:prstGeom prst="rect">
-              <a:avLst/>
-            </a:prstGeom>
-            <a:noFill/>
-            <a:ln>
-              <a:noFill/>
-            </a:ln>
-          </p:spPr>
-          <p:txBody>
-            <a:bodyPr wrap="none" lIns="0" tIns="0" rIns="0" bIns="0" anchor="t" anchorCtr="0">
-              <a:spAutoFit/>
-            </a:bodyPr>
-            <a:lstStyle/>
-            <a:p>
-              <a:pPr algn="l"/>
-              <a:r>
-                <a:rPr lang="zh-CN" sz="1420" b="1" dirty="0">
-                  <a:solidFill>
-                    <a:srgbClr val="008C95"/>
-                  </a:solidFill>
-                  <a:latin typeface="Arial" panose="020B0604020202020204"/>
-                  <a:ea typeface="Arial" panose="020B0604020202020204"/>
-                  <a:cs typeface="Arial" panose="020B0604020202020204"/>
-                </a:rPr>
-                <a:t>4</a:t>
-              </a:r>
-              <a:endParaRPr lang="zh-CN" sz="1420" b="1" dirty="0">
-                <a:solidFill>
-                  <a:srgbClr val="008C95"/>
-                </a:solidFill>
-                <a:latin typeface="Arial" panose="020B0604020202020204"/>
-                <a:ea typeface="Arial" panose="020B0604020202020204"/>
-                <a:cs typeface="Arial" panose="020B0604020202020204"/>
-              </a:endParaRPr>
-            </a:p>
-          </p:txBody>
-        </p:sp>
-        <p:sp>
-          <p:nvSpPr>
-            <p:cNvPr id="22" name="TextBox 22"/>
-            <p:cNvSpPr txBox="1"/>
-            <p:nvPr/>
-          </p:nvSpPr>
-          <p:spPr>
-            <a:xfrm>
-              <a:off x="1173480" y="4838700"/>
-              <a:ext cx="822960" cy="293370"/>
-            </a:xfrm>
-            <a:prstGeom prst="rect">
-              <a:avLst/>
-            </a:prstGeom>
-            <a:noFill/>
-            <a:ln>
-              <a:noFill/>
-            </a:ln>
-          </p:spPr>
-          <p:txBody>
-            <a:bodyPr wrap="none" lIns="0" tIns="0" rIns="0" bIns="0" anchor="t" anchorCtr="0">
-              <a:spAutoFit/>
-            </a:bodyPr>
-            <a:lstStyle/>
-            <a:p>
-              <a:pPr algn="l"/>
-              <a:r>
-                <a:rPr lang="zh-CN" sz="1500" b="1" dirty="0">
-                  <a:solidFill>
-                    <a:srgbClr val="FFFFFF"/>
-                  </a:solidFill>
-                  <a:latin typeface="Arial" panose="020B0604020202020204"/>
-                  <a:ea typeface="微软雅黑" panose="020B0503020204020204" charset="-122"/>
-                  <a:cs typeface="Arial" panose="020B0604020202020204"/>
-                </a:rPr>
-                <a:t>结果失效</a:t>
-              </a:r>
-              <a:endParaRPr lang="zh-CN" sz="1500" b="1" dirty="0">
-                <a:solidFill>
-                  <a:srgbClr val="FFFFFF"/>
-                </a:solidFill>
-                <a:latin typeface="Arial" panose="020B0604020202020204"/>
-                <a:ea typeface="微软雅黑" panose="020B0503020204020204" charset="-122"/>
-                <a:cs typeface="Arial" panose="020B0604020202020204"/>
-              </a:endParaRPr>
-            </a:p>
-          </p:txBody>
-        </p:sp>
-        <p:sp>
-          <p:nvSpPr>
-            <p:cNvPr id="23" name="TextBox 23"/>
-            <p:cNvSpPr txBox="1"/>
-            <p:nvPr/>
-          </p:nvSpPr>
-          <p:spPr>
-            <a:xfrm>
-              <a:off x="2565273" y="4862989"/>
-              <a:ext cx="4879097" cy="249364"/>
-            </a:xfrm>
-            <a:prstGeom prst="rect">
-              <a:avLst/>
-            </a:prstGeom>
-            <a:noFill/>
-            <a:ln>
-              <a:noFill/>
-            </a:ln>
-          </p:spPr>
-          <p:txBody>
-            <a:bodyPr wrap="none" lIns="0" tIns="0" rIns="0" bIns="0" anchor="t" anchorCtr="0">
-              <a:spAutoFit/>
-            </a:bodyPr>
-            <a:lstStyle/>
-            <a:p>
-              <a:pPr algn="l"/>
-              <a:r>
-                <a:rPr lang="zh-CN" sz="1280" dirty="0">
-                  <a:solidFill>
-                    <a:srgbClr val="FFFFFF"/>
-                  </a:solidFill>
-                  <a:latin typeface="Arial" panose="020B0604020202020204"/>
-                  <a:ea typeface="微软雅黑" panose="020B0503020204020204" charset="-122"/>
-                  <a:cs typeface="Arial" panose="020B0604020202020204"/>
-                </a:rPr>
-                <a:t>沿依赖索引失效查询缓存、Unsafe 结论和 Fuzz 目标，按需重算</a:t>
-              </a:r>
-              <a:endParaRPr lang="zh-CN" sz="1280" dirty="0">
-                <a:solidFill>
-                  <a:srgbClr val="FFFFFF"/>
-                </a:solidFill>
-                <a:latin typeface="Arial" panose="020B0604020202020204"/>
-                <a:ea typeface="微软雅黑" panose="020B0503020204020204" charset="-122"/>
-                <a:cs typeface="Arial" panose="020B0604020202020204"/>
-              </a:endParaRPr>
-            </a:p>
-          </p:txBody>
-        </p:sp>
-      </p:grpSp>
-      <p:grpSp>
-        <p:nvGrpSpPr>
-          <p:cNvPr id="27" name="update-example"/>
-          <p:cNvGrpSpPr/>
-          <p:nvPr/>
-        </p:nvGrpSpPr>
-        <p:grpSpPr>
-          <a:xfrm>
-            <a:off x="571500" y="5695950"/>
-            <a:ext cx="11010900" cy="523875"/>
-            <a:chOff x="571500" y="5695950"/>
-            <a:chExt cx="11010900" cy="523875"/>
-          </a:xfrm>
-        </p:grpSpPr>
-        <p:sp>
-          <p:nvSpPr>
-            <p:cNvPr id="25" name="Rectangle 25"/>
-            <p:cNvSpPr/>
-            <p:nvPr/>
-          </p:nvSpPr>
-          <p:spPr>
-            <a:xfrm>
-              <a:off x="571500" y="5695950"/>
-              <a:ext cx="11010900" cy="523875"/>
-            </a:xfrm>
-            <a:prstGeom prst="roundRect">
-              <a:avLst>
-                <a:gd name="adj" fmla="val 14545"/>
-              </a:avLst>
-            </a:prstGeom>
-            <a:solidFill>
-              <a:srgbClr val="FFF3E8"/>
-            </a:solidFill>
-            <a:ln>
-              <a:noFill/>
-            </a:ln>
-          </p:spPr>
-        </p:sp>
-        <p:sp>
-          <p:nvSpPr>
-            <p:cNvPr id="26" name="TextBox 26"/>
-            <p:cNvSpPr txBox="1"/>
-            <p:nvPr/>
-          </p:nvSpPr>
-          <p:spPr>
-            <a:xfrm>
-              <a:off x="793242" y="5864542"/>
-              <a:ext cx="9877386" cy="264033"/>
-            </a:xfrm>
-            <a:prstGeom prst="rect">
-              <a:avLst/>
-            </a:prstGeom>
-            <a:noFill/>
-            <a:ln>
-              <a:noFill/>
-            </a:ln>
-          </p:spPr>
-          <p:txBody>
-            <a:bodyPr wrap="none" lIns="0" tIns="0" rIns="0" bIns="0" anchor="t" anchorCtr="0">
-              <a:spAutoFit/>
-            </a:bodyPr>
-            <a:lstStyle/>
-            <a:p>
-              <a:pPr algn="l"/>
-              <a:r>
-                <a:rPr lang="zh-CN" sz="1350" b="1" dirty="0">
-                  <a:solidFill>
-                    <a:srgbClr val="D88230"/>
-                  </a:solidFill>
-                  <a:latin typeface="Arial" panose="020B0604020202020204"/>
-                  <a:ea typeface="微软雅黑" panose="020B0503020204020204" charset="-122"/>
-                  <a:cs typeface="Arial" panose="020B0604020202020204"/>
-                </a:rPr>
-                <a:t>案例修改：a 的类型／指针转换改变 → RA 记录 + rustc MIR 记录 + Call/Value 关系 + 相关 Unsafe/Fuzz 结果一起更新。</a:t>
-              </a:r>
-              <a:endParaRPr lang="zh-CN" sz="1350" b="1" dirty="0">
-                <a:solidFill>
-                  <a:srgbClr val="D88230"/>
-                </a:solidFill>
-                <a:latin typeface="Arial" panose="020B0604020202020204"/>
-                <a:ea typeface="微软雅黑" panose="020B0503020204020204" charset="-122"/>
-                <a:cs typeface="Arial" panose="020B0604020202020204"/>
-              </a:endParaRPr>
-            </a:p>
-          </p:txBody>
-        </p:sp>
-      </p:grpSp>
-    </p:spTree>
-  </p:cSld>
-  <p:clrMapOvr>
-    <a:masterClrMapping/>
-  </p:clrMapOvr>
-</p:sld>
-</file>
-
-<file path=ppt/slides/slide12.xml><?xml version="1.0" encoding="utf-8"?>
 <p:sld xmlns:a="http://schemas.openxmlformats.org/drawingml/2006/main" xmlns:r="http://schemas.openxmlformats.org/officeDocument/2006/relationships" xmlns:p="http://schemas.openxmlformats.org/presentationml/2006/main">
   <p:cSld>
     <p:bg>
@@ -6318,7 +5079,7 @@
 </p:sld>
 </file>
 
-<file path=ppt/slides/slide13.xml><?xml version="1.0" encoding="utf-8"?>
+<file path=ppt/slides/slide12.xml><?xml version="1.0" encoding="utf-8"?>
 <p:sld xmlns:a="http://schemas.openxmlformats.org/drawingml/2006/main" xmlns:r="http://schemas.openxmlformats.org/officeDocument/2006/relationships" xmlns:p="http://schemas.openxmlformats.org/presentationml/2006/main">
   <p:cSld>
     <p:spTree>
@@ -7565,7 +6326,7 @@
 </p:sld>
 </file>
 
-<file path=ppt/slides/slide14.xml><?xml version="1.0" encoding="utf-8"?>
+<file path=ppt/slides/slide13.xml><?xml version="1.0" encoding="utf-8"?>
 <p:sld xmlns:a="http://schemas.openxmlformats.org/drawingml/2006/main" xmlns:r="http://schemas.openxmlformats.org/officeDocument/2006/relationships" xmlns:p="http://schemas.openxmlformats.org/presentationml/2006/main">
   <p:cSld>
     <p:bg>
@@ -8514,7 +7275,7 @@
 </p:sld>
 </file>
 
-<file path=ppt/slides/slide15.xml><?xml version="1.0" encoding="utf-8"?>
+<file path=ppt/slides/slide14.xml><?xml version="1.0" encoding="utf-8"?>
 <p:sld xmlns:a="http://schemas.openxmlformats.org/drawingml/2006/main" xmlns:r="http://schemas.openxmlformats.org/officeDocument/2006/relationships" xmlns:p="http://schemas.openxmlformats.org/presentationml/2006/main">
   <p:cSld>
     <p:bg>
